--- a/选题一_益智消除网页游戏/演示材料/02_演示PPT.pptx
+++ b/选题一_益智消除网页游戏/演示材料/02_演示PPT.pptx
@@ -13409,7 +13409,7 @@
                           <a:latin typeface="微软雅黑"/>
                           <a:ea typeface="微软雅黑"/>
                         </a:rPr>
-                        <a:t>17</a:t>
+                        <a:t>5</a:t>
                       </a:r>
                     </a:p>
                   </a:txBody>

--- a/选题一_益智消除网页游戏/演示材料/02_演示PPT.pptx
+++ b/选题一_益智消除网页游戏/演示材料/02_演示PPT.pptx
@@ -7387,7 +7387,7 @@
                 <a:latin typeface="微软雅黑"/>
                 <a:ea typeface="微软雅黑"/>
               </a:rPr>
-              <a:t>变更留痕</a:t>
+              <a:t>变更留痕与审查</a:t>
             </a:r>
           </a:p>
         </p:txBody>
@@ -7427,7 +7427,7 @@
                 <a:latin typeface="微软雅黑"/>
                 <a:ea typeface="微软雅黑"/>
               </a:rPr>
-              <a:t>15 项需求变更逐项写明：改了什么 / 为什么 / 影响哪几条 / 对设计的影响 / 如何验证</a:t>
+              <a:t>15 项需求变更逐项说明；组员提交 PR #1 修复 3 处运行期缺陷，经复跑测试与接口核对后合并</a:t>
             </a:r>
           </a:p>
         </p:txBody>
@@ -8736,7 +8736,7 @@
                 <a:latin typeface="微软雅黑"/>
                 <a:ea typeface="微软雅黑"/>
               </a:rPr>
-              <a:t>— 现场演示操作</a:t>
+              <a:t>— 演示脚本与现场操作</a:t>
             </a:r>
           </a:p>
         </p:txBody>
@@ -8864,7 +8864,7 @@
                 <a:latin typeface="微软雅黑"/>
                 <a:ea typeface="微软雅黑"/>
               </a:rPr>
-              <a:t>— PPT 与讲稿</a:t>
+              <a:t>— 手机端实测与缺陷修复（PR #1）</a:t>
             </a:r>
           </a:p>
         </p:txBody>
@@ -8904,7 +8904,7 @@
                 <a:latin typeface="微软雅黑"/>
                 <a:ea typeface="微软雅黑"/>
               </a:rPr>
-              <a:t>— 文档校对与材料归档</a:t>
+              <a:t>— PPT 与讲稿、录屏备份</a:t>
             </a:r>
           </a:p>
         </p:txBody>
